--- a/scorecard-General/PAGINA-2BI/academia/materiales/08_Premium_Presentacion_Comercial.pptx
+++ b/scorecard-General/PAGINA-2BI/academia/materiales/08_Premium_Presentacion_Comercial.pptx
@@ -2705,7 +2705,7 @@
                 <a:ea typeface="Calibri" pitchFamily="34" charset="-122"/>
                 <a:cs typeface="Calibri" pitchFamily="34" charset="-120"/>
               </a:rPr>
-              <a:t>El stack BI completo: Power BI + Fabric + Python + AI.</a:t>
+              <a:t>Power BI a nivel arquitecto: DAX patterns, visualización avanzada y producción corporativa.</a:t>
             </a:r>
             <a:endParaRPr lang="en-US" sz="2800" dirty="0"/>
           </a:p>
@@ -3058,7 +3058,7 @@
                 <a:ea typeface="Calibri" pitchFamily="34" charset="-122"/>
                 <a:cs typeface="Calibri" pitchFamily="34" charset="-120"/>
               </a:rPr>
-              <a:t>SQL, n8n + AI, dashboards inspiración, plantilla freelance.</a:t>
+              <a:t>SQL para BI, dashboards inspiración, plantilla propuesta freelance, repositorio Git ejemplo.</a:t>
             </a:r>
             <a:endParaRPr lang="en-US" sz="1100" dirty="0"/>
           </a:p>
@@ -3161,7 +3161,7 @@
                 <a:ea typeface="Calibri" pitchFamily="34" charset="-122"/>
                 <a:cs typeface="Calibri" pitchFamily="34" charset="-120"/>
               </a:rPr>
-              <a:t>Bono 2 — Setup gratuito de Microsoft Fabric trial</a:t>
+              <a:t>Bono 2 — Tabular Editor 3 license consideration</a:t>
             </a:r>
             <a:endParaRPr lang="en-US" sz="1400" dirty="0"/>
           </a:p>
@@ -3200,7 +3200,7 @@
                 <a:ea typeface="Calibri" pitchFamily="34" charset="-122"/>
                 <a:cs typeface="Calibri" pitchFamily="34" charset="-120"/>
               </a:rPr>
-              <a:t>Te configuro Fabric capacity F2 + Lakehouse base.</a:t>
+              <a:t>Recomendación de configuración profesional + scripts BPA custom.</a:t>
             </a:r>
             <a:endParaRPr lang="en-US" sz="1100" dirty="0"/>
           </a:p>
@@ -3303,7 +3303,7 @@
                 <a:ea typeface="Calibri" pitchFamily="34" charset="-122"/>
                 <a:cs typeface="Calibri" pitchFamily="34" charset="-120"/>
               </a:rPr>
-              <a:t>Bono 3 — 30 minutos de consultoría arquitectura</a:t>
+              <a:t>Bono 3 — 30 minutos de consultoría arquitectura Power BI</a:t>
             </a:r>
             <a:endParaRPr lang="en-US" sz="1400" dirty="0"/>
           </a:p>
@@ -4846,7 +4846,7 @@
                 <a:ea typeface="Calibri" pitchFamily="34" charset="-122"/>
                 <a:cs typeface="Calibri" pitchFamily="34" charset="-120"/>
               </a:rPr>
-              <a:t>Tarifa promedio de un proyecto BI con Fabric + AI para PyME mediana.</a:t>
+              <a:t>Tarifa promedio de un proyecto BI con Power BI Premium + AI para PyME mediana.</a:t>
             </a:r>
             <a:endParaRPr lang="en-US" sz="1100" dirty="0"/>
           </a:p>
@@ -6126,7 +6126,7 @@
                 <a:ea typeface="Calibri" pitchFamily="34" charset="-122"/>
                 <a:cs typeface="Calibri" pitchFamily="34" charset="-120"/>
               </a:rPr>
-              <a:t>✓  Quieres el stack completo: BI + Fabric + Python + AI.</a:t>
+              <a:t>✓  Quieres el stack completo: BI + Power BI Premium + Python + AI.</a:t>
             </a:r>
             <a:endParaRPr lang="en-US" sz="1200" dirty="0"/>
           </a:p>
@@ -6426,7 +6426,7 @@
                 <a:ea typeface="Calibri" pitchFamily="34" charset="-122"/>
                 <a:cs typeface="Calibri" pitchFamily="34" charset="-120"/>
               </a:rPr>
-              <a:t>✗  No te interesa Fabric ni Python.</a:t>
+              <a:t>✗  No te interesa Power BI Premium ni Python.</a:t>
             </a:r>
             <a:endParaRPr lang="en-US" sz="1200" dirty="0"/>
           </a:p>
@@ -10666,7 +10666,7 @@
                 <a:ea typeface="Calibri" pitchFamily="34" charset="-122"/>
                 <a:cs typeface="Calibri" pitchFamily="34" charset="-120"/>
               </a:rPr>
-              <a:t>✗  Fabric te suena pero no lo dominas.</a:t>
+              <a:t>✗  Power BI Premium te suena pero no lo dominas.</a:t>
             </a:r>
             <a:endParaRPr lang="en-US" sz="1300" dirty="0"/>
           </a:p>
@@ -10927,7 +10927,7 @@
                 <a:ea typeface="Calibri" pitchFamily="34" charset="-122"/>
                 <a:cs typeface="Calibri" pitchFamily="34" charset="-120"/>
               </a:rPr>
-              <a:t>✓  Stack BI completo: Power BI + Fabric.</a:t>
+              <a:t>✓  Stack BI completo: Power BI + Power BI Premium.</a:t>
             </a:r>
             <a:endParaRPr lang="en-US" sz="1300" dirty="0"/>
           </a:p>
@@ -11005,7 +11005,7 @@
                 <a:ea typeface="Calibri" pitchFamily="34" charset="-122"/>
                 <a:cs typeface="Calibri" pitchFamily="34" charset="-120"/>
               </a:rPr>
-              <a:t>✓  Lakehouse + Direct Lake productivo.</a:t>
+              <a:t>✓  Workspace + Premium Capacity productivo.</a:t>
             </a:r>
             <a:endParaRPr lang="en-US" sz="1300" dirty="0"/>
           </a:p>
@@ -11044,7 +11044,7 @@
                 <a:ea typeface="Calibri" pitchFamily="34" charset="-122"/>
                 <a:cs typeface="Calibri" pitchFamily="34" charset="-120"/>
               </a:rPr>
-              <a:t>✓  Notebooks Python con sempy y EDA.</a:t>
+              <a:t>✓  Notebooks Python con DAX Studio y EDA.</a:t>
             </a:r>
             <a:endParaRPr lang="en-US" sz="1300" dirty="0"/>
           </a:p>
@@ -11618,7 +11618,7 @@
                 <a:ea typeface="Calibri" pitchFamily="34" charset="-122"/>
                 <a:cs typeface="Calibri" pitchFamily="34" charset="-120"/>
               </a:rPr>
-              <a:t>★  Microsoft Fabric, Direct Lake y Semantic Link.</a:t>
+              <a:t>★  Power BI Premium, Premium Capacity y Semantic Link.</a:t>
             </a:r>
             <a:endParaRPr lang="en-US" sz="1300" dirty="0"/>
           </a:p>
@@ -11657,7 +11657,7 @@
                 <a:ea typeface="Calibri" pitchFamily="34" charset="-122"/>
                 <a:cs typeface="Calibri" pitchFamily="34" charset="-120"/>
               </a:rPr>
-              <a:t>★  Python (sempy, pandas, scikit-learn) y AI agents.</a:t>
+              <a:t>★  Python (DAX Studio, pandas, Tabular Editor) y AI agents.</a:t>
             </a:r>
             <a:endParaRPr lang="en-US" sz="1300" dirty="0"/>
           </a:p>
@@ -11696,7 +11696,7 @@
                 <a:ea typeface="Calibri" pitchFamily="34" charset="-122"/>
                 <a:cs typeface="Calibri" pitchFamily="34" charset="-120"/>
               </a:rPr>
-              <a:t>★  n8n, Anthropic Claude, orquestación de agentes.</a:t>
+              <a:t>★  Power BI Subscriptions, Smart Narrative, orquestación de agentes.</a:t>
             </a:r>
             <a:endParaRPr lang="en-US" sz="1300" dirty="0"/>
           </a:p>
@@ -13012,7 +13012,7 @@
                 <a:ea typeface="Calibri" pitchFamily="34" charset="-122"/>
                 <a:cs typeface="Calibri" pitchFamily="34" charset="-120"/>
               </a:rPr>
-              <a:t>Fabric + Copilot + Automatización + Portafolio</a:t>
+              <a:t>Power BI Service Avanzado + Portafolio + Cierre</a:t>
             </a:r>
             <a:endParaRPr lang="en-US" sz="1100" dirty="0"/>
           </a:p>
@@ -13142,7 +13142,7 @@
                 <a:ea typeface="Calibri" pitchFamily="34" charset="-122"/>
                 <a:cs typeface="Calibri" pitchFamily="34" charset="-120"/>
               </a:rPr>
-              <a:t>Microsoft Fabric + Direct Lake Mode</a:t>
+              <a:t>DAX Avanzado — Patterns Empresariales</a:t>
             </a:r>
             <a:endParaRPr lang="en-US" sz="1100" dirty="0"/>
           </a:p>
@@ -13272,7 +13272,7 @@
                 <a:ea typeface="Calibri" pitchFamily="34" charset="-122"/>
                 <a:cs typeface="Calibri" pitchFamily="34" charset="-120"/>
               </a:rPr>
-              <a:t>Python + Power BI con Semantic Link</a:t>
+              <a:t>Visualización Avanzada y Storytelling</a:t>
             </a:r>
             <a:endParaRPr lang="en-US" sz="1100" dirty="0"/>
           </a:p>
@@ -13402,7 +13402,7 @@
                 <a:ea typeface="Calibri" pitchFamily="34" charset="-122"/>
                 <a:cs typeface="Calibri" pitchFamily="34" charset="-120"/>
               </a:rPr>
-              <a:t>AI Agents para BI (n8n + Anthropic + Power BI)</a:t>
+              <a:t>Power BI en Producción Corporativa (.pbip + TMDL + Git)</a:t>
             </a:r>
             <a:endParaRPr lang="en-US" sz="1100" dirty="0"/>
           </a:p>
@@ -13786,7 +13786,7 @@
                 <a:ea typeface="Calibri" pitchFamily="34" charset="-122"/>
                 <a:cs typeface="Calibri" pitchFamily="34" charset="-120"/>
               </a:rPr>
-              <a:t>Microsoft Fabric Lakehouse</a:t>
+              <a:t>Power BI Premium Workspace</a:t>
             </a:r>
             <a:endParaRPr lang="en-US" sz="1300" dirty="0"/>
           </a:p>
@@ -13825,7 +13825,7 @@
                 <a:ea typeface="Calibri" pitchFamily="34" charset="-122"/>
                 <a:cs typeface="Calibri" pitchFamily="34" charset="-120"/>
               </a:rPr>
-              <a:t>OneLake + Direct Lake + Spark.</a:t>
+              <a:t>Premium Storage + Premium Capacity + Spark.</a:t>
             </a:r>
             <a:endParaRPr lang="en-US" sz="1100" dirty="0"/>
           </a:p>
@@ -13930,7 +13930,7 @@
                 <a:ea typeface="Calibri" pitchFamily="34" charset="-122"/>
                 <a:cs typeface="Calibri" pitchFamily="34" charset="-120"/>
               </a:rPr>
-              <a:t>sempy.evaluate_dax()</a:t>
+              <a:t>DAX Studio</a:t>
             </a:r>
             <a:endParaRPr lang="en-US" sz="1300" dirty="0"/>
           </a:p>
@@ -14218,7 +14218,7 @@
                 <a:ea typeface="Calibri" pitchFamily="34" charset="-122"/>
                 <a:cs typeface="Calibri" pitchFamily="34" charset="-120"/>
               </a:rPr>
-              <a:t>n8n + Anthropic + WhatsApp</a:t>
+              <a:t>Power BI Subscriptions + Smart Narrative + WhatsApp</a:t>
             </a:r>
             <a:endParaRPr lang="en-US" sz="1300" dirty="0"/>
           </a:p>
@@ -14362,7 +14362,7 @@
                 <a:ea typeface="Calibri" pitchFamily="34" charset="-122"/>
                 <a:cs typeface="Calibri" pitchFamily="34" charset="-120"/>
               </a:rPr>
-              <a:t>OneLake Shortcuts</a:t>
+              <a:t>Premium Storage Shortcuts</a:t>
             </a:r>
             <a:endParaRPr lang="en-US" sz="1300" dirty="0"/>
           </a:p>
@@ -15956,7 +15956,7 @@
                 <a:ea typeface="Calibri" pitchFamily="34" charset="-122"/>
                 <a:cs typeface="Calibri" pitchFamily="34" charset="-120"/>
               </a:rPr>
-              <a:t>Notebook Python (sempy)</a:t>
+              <a:t>Notebook Python (DAX Studio</a:t>
             </a:r>
             <a:endParaRPr lang="en-US" sz="1500" dirty="0"/>
           </a:p>
@@ -16125,7 +16125,7 @@
                 <a:ea typeface="Calibri" pitchFamily="34" charset="-122"/>
                 <a:cs typeface="Calibri" pitchFamily="34" charset="-120"/>
               </a:rPr>
-              <a:t>Lakehouse Fabric</a:t>
+              <a:t>Workspace Power BI Premium</a:t>
             </a:r>
             <a:endParaRPr lang="en-US" sz="1500" dirty="0"/>
           </a:p>
@@ -16164,7 +16164,7 @@
                 <a:ea typeface="Calibri" pitchFamily="34" charset="-122"/>
                 <a:cs typeface="Calibri" pitchFamily="34" charset="-120"/>
               </a:rPr>
-              <a:t>Direct Lake mode con tu data productiva.</a:t>
+              <a:t>Premium Capacity mode con tu data productiva.</a:t>
             </a:r>
             <a:endParaRPr lang="en-US" sz="1100" dirty="0"/>
           </a:p>
@@ -16723,7 +16723,7 @@
                 <a:ea typeface="Calibri" pitchFamily="34" charset="-122"/>
                 <a:cs typeface="Calibri" pitchFamily="34" charset="-120"/>
               </a:rPr>
-              <a:t>24 horas: 8 core + 4 avanzadas (Fabric, Python, AI).</a:t>
+              <a:t>24 horas: 8 core + 4 avanzadas Power BI puras.</a:t>
             </a:r>
             <a:endParaRPr lang="en-US" sz="1100" dirty="0"/>
           </a:p>
@@ -16915,7 +16915,7 @@
                 <a:ea typeface="Calibri" pitchFamily="34" charset="-122"/>
                 <a:cs typeface="Calibri" pitchFamily="34" charset="-120"/>
               </a:rPr>
-              <a:t>Incluye hacks exclusivos de Fabric, Python y agents.</a:t>
+              <a:t>Incluye hacks exclusivos de DAX patterns y .pbip + Git.</a:t>
             </a:r>
             <a:endParaRPr lang="en-US" sz="1100" dirty="0"/>
           </a:p>
@@ -17107,7 +17107,7 @@
                 <a:ea typeface="Calibri" pitchFamily="34" charset="-122"/>
                 <a:cs typeface="Calibri" pitchFamily="34" charset="-120"/>
               </a:rPr>
-              <a:t>Star schema, KPI exec, Fabric workspace, n8n flows.</a:t>
+              <a:t>Star schema, KPI exec, temas JSON profundos, bookmarks avanzados.</a:t>
             </a:r>
             <a:endParaRPr lang="en-US" sz="1100" dirty="0"/>
           </a:p>
@@ -17299,7 +17299,7 @@
                 <a:ea typeface="Calibri" pitchFamily="34" charset="-122"/>
                 <a:cs typeface="Calibri" pitchFamily="34" charset="-120"/>
               </a:rPr>
-              <a:t>Incluye patrones avanzados de cohorts, ABC, RFM.</a:t>
+              <a:t>Incluye patrones avanzados: cohorts, ABC, RFM, churn, basket analysis.</a:t>
             </a:r>
             <a:endParaRPr lang="en-US" sz="1100" dirty="0"/>
           </a:p>
@@ -17452,7 +17452,7 @@
                 <a:ea typeface="Calibri" pitchFamily="34" charset="-122"/>
                 <a:cs typeface="Calibri" pitchFamily="34" charset="-120"/>
               </a:rPr>
-              <a:t>Stack BI + AI integrado</a:t>
+              <a:t>Stack profesional Power BI completo</a:t>
             </a:r>
             <a:endParaRPr lang="en-US" sz="1300" dirty="0"/>
           </a:p>
@@ -17491,7 +17491,7 @@
                 <a:ea typeface="Calibri" pitchFamily="34" charset="-122"/>
                 <a:cs typeface="Calibri" pitchFamily="34" charset="-120"/>
               </a:rPr>
-              <a:t>Tabular Editor 3, Fabric trial, Anthropic API setup.</a:t>
+              <a:t>DAX Studio, Tabular Editor, ALM Toolkit, .pbip + TMDL.</a:t>
             </a:r>
             <a:endParaRPr lang="en-US" sz="1100" dirty="0"/>
           </a:p>

--- a/scorecard-General/PAGINA-2BI/academia/materiales/08_Premium_Presentacion_Comercial.pptx
+++ b/scorecard-General/PAGINA-2BI/academia/materiales/08_Premium_Presentacion_Comercial.pptx
@@ -14074,7 +14074,7 @@
                 <a:ea typeface="Calibri" pitchFamily="34" charset="-122"/>
                 <a:cs typeface="Calibri" pitchFamily="34" charset="-120"/>
               </a:rPr>
-              <a:t>Claude Sonnet para BI</a:t>
+              <a:t>DAX Studio + VertiPaq Analyzer</a:t>
             </a:r>
             <a:endParaRPr lang="en-US" sz="1300" dirty="0"/>
           </a:p>
@@ -14113,7 +14113,7 @@
                 <a:ea typeface="Calibri" pitchFamily="34" charset="-122"/>
                 <a:cs typeface="Calibri" pitchFamily="34" charset="-120"/>
               </a:rPr>
-              <a:t>Análisis numérico con criterio.</a:t>
+              <a:t>Análisis del modelo y optimización con criterio.</a:t>
             </a:r>
             <a:endParaRPr lang="en-US" sz="1100" dirty="0"/>
           </a:p>
